--- a/1 Year 12 Weekly/Week 18 (25 Jan) 1.4.2 Arrays, stacks, queues/1 Lesson 1.4.2.pptx
+++ b/1 Year 12 Weekly/Week 18 (25 Jan) 1.4.2 Arrays, stacks, queues/1 Lesson 1.4.2.pptx
@@ -3183,7 +3183,7 @@
                 </a:solidFill>
                 <a:latin typeface="Calibri"/>
               </a:rPr>
-              <a:t>Lesson deck — editable skeleton: adapt freely.</a:t>
+              <a:t>Editable lesson deck — adapt freely.</a:t>
             </a:r>
           </a:p>
         </p:txBody>
@@ -3272,7 +3272,7 @@
           <a:p>
             <a:pPr/>
             <a:r>
-              <a:rPr sz="2200" b="0">
+              <a:rPr sz="2000" b="0">
                 <a:solidFill>
                   <a:srgbClr val="222222"/>
                 </a:solidFill>
@@ -3284,7 +3284,7 @@
           <a:p>
             <a:pPr/>
             <a:r>
-              <a:rPr sz="2200" b="0">
+              <a:rPr sz="2000" b="0">
                 <a:solidFill>
                   <a:srgbClr val="222222"/>
                 </a:solidFill>
@@ -3296,7 +3296,7 @@
           <a:p>
             <a:pPr/>
             <a:r>
-              <a:rPr sz="2200" b="0">
+              <a:rPr sz="2000" b="0">
                 <a:solidFill>
                   <a:srgbClr val="222222"/>
                 </a:solidFill>
@@ -3403,7 +3403,7 @@
           <a:p>
             <a:pPr lvl="1"/>
             <a:r>
-              <a:rPr sz="2000" b="0">
+              <a:rPr sz="1900" b="0">
                 <a:solidFill>
                   <a:srgbClr val="222222"/>
                 </a:solidFill>
@@ -3415,7 +3415,7 @@
           <a:p>
             <a:pPr lvl="1"/>
             <a:r>
-              <a:rPr sz="2000" b="0">
+              <a:rPr sz="1900" b="0">
                 <a:solidFill>
                   <a:srgbClr val="222222"/>
                 </a:solidFill>
@@ -3427,7 +3427,7 @@
           <a:p>
             <a:pPr lvl="1"/>
             <a:r>
-              <a:rPr sz="2000" b="0">
+              <a:rPr sz="1900" b="0">
                 <a:solidFill>
                   <a:srgbClr val="222222"/>
                 </a:solidFill>
@@ -3439,7 +3439,7 @@
           <a:p>
             <a:pPr lvl="1"/>
             <a:r>
-              <a:rPr sz="2000" b="0">
+              <a:rPr sz="1900" b="0">
                 <a:solidFill>
                   <a:srgbClr val="222222"/>
                 </a:solidFill>
@@ -3451,7 +3451,7 @@
           <a:p>
             <a:pPr lvl="1"/>
             <a:r>
-              <a:rPr sz="2000" b="0">
+              <a:rPr sz="1900" b="0">
                 <a:solidFill>
                   <a:srgbClr val="222222"/>
                 </a:solidFill>
@@ -3463,7 +3463,7 @@
           <a:p>
             <a:pPr lvl="1"/>
             <a:r>
-              <a:rPr sz="2000" b="0">
+              <a:rPr sz="1900" b="0">
                 <a:solidFill>
                   <a:srgbClr val="222222"/>
                 </a:solidFill>
@@ -3475,7 +3475,7 @@
           <a:p>
             <a:pPr lvl="1"/>
             <a:r>
-              <a:rPr sz="2000" b="0">
+              <a:rPr sz="1900" b="0">
                 <a:solidFill>
                   <a:srgbClr val="222222"/>
                 </a:solidFill>
@@ -4679,7 +4679,7 @@
           <a:p>
             <a:pPr/>
             <a:r>
-              <a:rPr sz="2200" b="0">
+              <a:rPr sz="2000" b="0">
                 <a:solidFill>
                   <a:srgbClr val="222222"/>
                 </a:solidFill>
@@ -4691,7 +4691,7 @@
           <a:p>
             <a:pPr/>
             <a:r>
-              <a:rPr sz="2200" b="0">
+              <a:rPr sz="2000" b="0">
                 <a:solidFill>
                   <a:srgbClr val="222222"/>
                 </a:solidFill>
@@ -4703,7 +4703,7 @@
           <a:p>
             <a:pPr/>
             <a:r>
-              <a:rPr sz="2200" b="0">
+              <a:rPr sz="2000" b="0">
                 <a:solidFill>
                   <a:srgbClr val="222222"/>
                 </a:solidFill>
@@ -4798,7 +4798,7 @@
           <a:p>
             <a:pPr/>
             <a:r>
-              <a:rPr sz="2200" b="0">
+              <a:rPr sz="2000" b="0">
                 <a:solidFill>
                   <a:srgbClr val="222222"/>
                 </a:solidFill>
@@ -4810,7 +4810,7 @@
           <a:p>
             <a:pPr/>
             <a:r>
-              <a:rPr sz="2200" b="0">
+              <a:rPr sz="2000" b="0">
                 <a:solidFill>
                   <a:srgbClr val="222222"/>
                 </a:solidFill>
@@ -4822,7 +4822,7 @@
           <a:p>
             <a:pPr/>
             <a:r>
-              <a:rPr sz="2200" b="0">
+              <a:rPr sz="2000" b="0">
                 <a:solidFill>
                   <a:srgbClr val="222222"/>
                 </a:solidFill>
@@ -4917,7 +4917,7 @@
           <a:p>
             <a:pPr/>
             <a:r>
-              <a:rPr sz="2200" b="0">
+              <a:rPr sz="2000" b="0">
                 <a:solidFill>
                   <a:srgbClr val="222222"/>
                 </a:solidFill>
@@ -4929,7 +4929,7 @@
           <a:p>
             <a:pPr/>
             <a:r>
-              <a:rPr sz="2200" b="0">
+              <a:rPr sz="2000" b="0">
                 <a:solidFill>
                   <a:srgbClr val="222222"/>
                 </a:solidFill>
@@ -4941,7 +4941,7 @@
           <a:p>
             <a:pPr/>
             <a:r>
-              <a:rPr sz="2200" b="0">
+              <a:rPr sz="2000" b="0">
                 <a:solidFill>
                   <a:srgbClr val="222222"/>
                 </a:solidFill>
@@ -5036,7 +5036,7 @@
           <a:p>
             <a:pPr/>
             <a:r>
-              <a:rPr sz="2200" b="0">
+              <a:rPr sz="2000" b="0">
                 <a:solidFill>
                   <a:srgbClr val="222222"/>
                 </a:solidFill>
@@ -5048,7 +5048,7 @@
           <a:p>
             <a:pPr/>
             <a:r>
-              <a:rPr sz="2200" b="0">
+              <a:rPr sz="2000" b="0">
                 <a:solidFill>
                   <a:srgbClr val="222222"/>
                 </a:solidFill>
@@ -5060,7 +5060,7 @@
           <a:p>
             <a:pPr/>
             <a:r>
-              <a:rPr sz="2200" b="0">
+              <a:rPr sz="2000" b="0">
                 <a:solidFill>
                   <a:srgbClr val="222222"/>
                 </a:solidFill>
